--- a/classes/parte-3-hacking-etico-y-pentesting-metodologia/082-persistencia-en-sistemas-comprometidos/clase-082-presentacion.pptx
+++ b/classes/parte-3-hacking-etico-y-pentesting-metodologia/082-persistencia-en-sistemas-comprometidos/clase-082-presentacion.pptx
@@ -17,6 +17,9 @@
     <p:sldId id="265" r:id="rId16"/>
     <p:sldId id="266" r:id="rId17"/>
     <p:sldId id="267" r:id="rId18"/>
+    <p:sldId id="268" r:id="rId19"/>
+    <p:sldId id="269" r:id="rId20"/>
+    <p:sldId id="270" r:id="rId21"/>
   </p:sldIdLst>
   <p:sldSz cx="9144000" cy="6858000" type="screen4x3"/>
   <p:notesSz cx="6858000" cy="9144000"/>
@@ -3198,7 +3201,7 @@
                   <a:srgbClr val="0B3D2E"/>
                 </a:solidFill>
               </a:rPr>
-              <a:t>⚠️ Errores comunes</a:t>
+              <a:t>✍️ Ejercicios</a:t>
             </a:r>
           </a:p>
         </p:txBody>
@@ -3236,67 +3239,82 @@
                   <a:srgbClr val="22282E"/>
                 </a:solidFill>
               </a:rPr>
-              <a:t>•  La persistencia no reactiva — Ruta o permisos del payload; verifica que exista y sea ejecutable</a:t>
-            </a:r>
-          </a:p>
-          <a:p>
-            <a:pPr>
-              <a:spcAft>
-                <a:spcPts val="600"/>
-              </a:spcAft>
-            </a:pPr>
-            <a:r>
-              <a:rPr sz="1500">
-                <a:solidFill>
-                  <a:srgbClr val="22282E"/>
-                </a:solidFill>
-              </a:rPr>
-              <a:t>•  crontab -r borra todo el crontab — Cuidado: elimina TODAS las tareas; edita en vez de borrar si hay legítimas</a:t>
-            </a:r>
-          </a:p>
-          <a:p>
-            <a:pPr>
-              <a:spcAft>
-                <a:spcPts val="600"/>
-              </a:spcAft>
-            </a:pPr>
-            <a:r>
-              <a:rPr sz="1500">
-                <a:solidFill>
-                  <a:srgbClr val="22282E"/>
-                </a:solidFill>
-              </a:rPr>
-              <a:t>•  Run key ejecuta pero sin sesión — LHOST/handler no disponibles; ten el listener activo</a:t>
-            </a:r>
-          </a:p>
-          <a:p>
-            <a:pPr>
-              <a:spcAft>
-                <a:spcPts val="600"/>
-              </a:spcAft>
-            </a:pPr>
-            <a:r>
-              <a:rPr sz="1500">
-                <a:solidFill>
-                  <a:srgbClr val="22282E"/>
-                </a:solidFill>
-              </a:rPr>
-              <a:t>•  Tarea no corre onlogon — Trigger o usuario incorrectos; revisa con schtasks /query /v</a:t>
-            </a:r>
-          </a:p>
-          <a:p>
-            <a:pPr>
-              <a:spcAft>
-                <a:spcPts val="600"/>
-              </a:spcAft>
-            </a:pPr>
-            <a:r>
-              <a:rPr sz="1500">
-                <a:solidFill>
-                  <a:srgbClr val="22282E"/>
-                </a:solidFill>
-              </a:rPr>
-              <a:t>•  Olvidas limpiar un artefacto — Sin cleanup log; documenta SIEMPRE cada cambio</a:t>
+              <a:t>•  Instala y luego elimina una persistencia por cron, documentando ambos pasos.</a:t>
+            </a:r>
+          </a:p>
+          <a:p>
+            <a:pPr>
+              <a:spcAft>
+                <a:spcPts val="600"/>
+              </a:spcAft>
+            </a:pPr>
+            <a:r>
+              <a:rPr sz="1500">
+                <a:solidFill>
+                  <a:srgbClr val="22282E"/>
+                </a:solidFill>
+              </a:rPr>
+              <a:t>•  Añade una clave SSH autorizada y explica por qué es difícil de detectar.</a:t>
+            </a:r>
+          </a:p>
+          <a:p>
+            <a:pPr>
+              <a:spcAft>
+                <a:spcPts val="600"/>
+              </a:spcAft>
+            </a:pPr>
+            <a:r>
+              <a:rPr sz="1500">
+                <a:solidFill>
+                  <a:srgbClr val="22282E"/>
+                </a:solidFill>
+              </a:rPr>
+              <a:t>•  Crea una tarea programada Windows onlogon y verifícala con schtasks /query.</a:t>
+            </a:r>
+          </a:p>
+          <a:p>
+            <a:pPr>
+              <a:spcAft>
+                <a:spcPts val="600"/>
+              </a:spcAft>
+            </a:pPr>
+            <a:r>
+              <a:rPr sz="1500">
+                <a:solidFill>
+                  <a:srgbClr val="22282E"/>
+                </a:solidFill>
+              </a:rPr>
+              <a:t>•  Mapea cinco técnicas de persistencia a sus IDs de MITRE ATT&amp;CK.</a:t>
+            </a:r>
+          </a:p>
+          <a:p>
+            <a:pPr>
+              <a:spcAft>
+                <a:spcPts val="600"/>
+              </a:spcAft>
+            </a:pPr>
+            <a:r>
+              <a:rPr sz="1500">
+                <a:solidFill>
+                  <a:srgbClr val="22282E"/>
+                </a:solidFill>
+              </a:rPr>
+              <a:t>•  Explica cómo un defensor detecta cambios en las Run keys.</a:t>
+            </a:r>
+          </a:p>
+          <a:p>
+            <a:pPr>
+              <a:spcAft>
+                <a:spcPts val="600"/>
+              </a:spcAft>
+            </a:pPr>
+            <a:r>
+              <a:rPr sz="1500">
+                <a:solidFill>
+                  <a:srgbClr val="22282E"/>
+                </a:solidFill>
+              </a:rPr>
+              <a:t>•  Redacta un "cleanup log" modelo con columnas: técnica, artefacto, comando de reversión.</a:t>
             </a:r>
           </a:p>
         </p:txBody>
@@ -3347,7 +3365,7 @@
                   <a:srgbClr val="0B3D2E"/>
                 </a:solidFill>
               </a:rPr>
-              <a:t>❓ Preguntas frecuentes</a:t>
+              <a:t>📝 Reto verificable</a:t>
             </a:r>
           </a:p>
         </p:txBody>
@@ -3385,97 +3403,22 @@
                   <a:srgbClr val="22282E"/>
                 </a:solidFill>
               </a:rPr>
-              <a:t>•  ❓ ¿Por qué demostrar persistencia en un pentest?</a:t>
-            </a:r>
-          </a:p>
-          <a:p>
-            <a:pPr>
-              <a:spcAft>
-                <a:spcPts val="600"/>
-              </a:spcAft>
-            </a:pPr>
-            <a:r>
-              <a:rPr sz="1500">
-                <a:solidFill>
-                  <a:srgbClr val="22282E"/>
-                </a:solidFill>
-              </a:rPr>
-              <a:t>•  Porque muestra al cliente el impacto real: un atacante no solo entra, se queda. Ayuda a justificar inversiones en detección y respuesta. Pero se hace de forma controlada y reversible.</a:t>
-            </a:r>
-          </a:p>
-          <a:p>
-            <a:pPr>
-              <a:spcAft>
-                <a:spcPts val="600"/>
-              </a:spcAft>
-            </a:pPr>
-            <a:r>
-              <a:rPr sz="1500">
-                <a:solidFill>
-                  <a:srgbClr val="22282E"/>
-                </a:solidFill>
-              </a:rPr>
-              <a:t>•  ❓ ¿Cuál es la técnica de persistencia más común?</a:t>
-            </a:r>
-          </a:p>
-          <a:p>
-            <a:pPr>
-              <a:spcAft>
-                <a:spcPts val="600"/>
-              </a:spcAft>
-            </a:pPr>
-            <a:r>
-              <a:rPr sz="1500">
-                <a:solidFill>
-                  <a:srgbClr val="22282E"/>
-                </a:solidFill>
-              </a:rPr>
-              <a:t>•  En Windows, las Run keys y las tareas programadas; en Linux, cron y claves SSH. Son fáciles de implementar y, si no se monitorizan, pasan desapercibidas.</a:t>
-            </a:r>
-          </a:p>
-          <a:p>
-            <a:pPr>
-              <a:spcAft>
-                <a:spcPts val="600"/>
-              </a:spcAft>
-            </a:pPr>
-            <a:r>
-              <a:rPr sz="1500">
-                <a:solidFill>
-                  <a:srgbClr val="22282E"/>
-                </a:solidFill>
-              </a:rPr>
-              <a:t>•  ❓ ¿Qué es una persistencia "fileless"?</a:t>
-            </a:r>
-          </a:p>
-          <a:p>
-            <a:pPr>
-              <a:spcAft>
-                <a:spcPts val="600"/>
-              </a:spcAft>
-            </a:pPr>
-            <a:r>
-              <a:rPr sz="1500">
-                <a:solidFill>
-                  <a:srgbClr val="22282E"/>
-                </a:solidFill>
-              </a:rPr>
-              <a:t>•  Una que no deja archivos en disco, como las suscripciones a eventos WMI o el uso del registro para almacenar payloads. Son más difíciles de detectar por antivirus tradicionales.</a:t>
-            </a:r>
-          </a:p>
-          <a:p>
-            <a:pPr>
-              <a:spcAft>
-                <a:spcPts val="600"/>
-              </a:spcAft>
-            </a:pPr>
-            <a:r>
-              <a:rPr sz="1500">
-                <a:solidFill>
-                  <a:srgbClr val="22282E"/>
-                </a:solidFill>
-              </a:rPr>
-              <a:t>•  ❓ ¿Qué pasa si olvido limpiar una persistencia?</a:t>
+              <a:t>•  Implementa una persistencia por sistema operativo (Linux y Windows) en tu laboratorio, verifica que sobreviven a un reinicio y límpialas por completo.</a:t>
+            </a:r>
+          </a:p>
+          <a:p>
+            <a:pPr>
+              <a:spcAft>
+                <a:spcPts val="600"/>
+              </a:spcAft>
+            </a:pPr>
+            <a:r>
+              <a:rPr sz="1500">
+                <a:solidFill>
+                  <a:srgbClr val="22282E"/>
+                </a:solidFill>
+              </a:rPr>
+              <a:t>•  Criterio de aceptación: demuestras que ambas persistencias reactivan el acceso tras reiniciar; presentas un cleanup log con el comando de reversión de cada una; tras la limpieza, una comprobación…</a:t>
             </a:r>
           </a:p>
         </p:txBody>
@@ -3526,7 +3469,7 @@
                   <a:srgbClr val="0B3D2E"/>
                 </a:solidFill>
               </a:rPr>
-              <a:t>🔗 Referencias</a:t>
+              <a:t>⚠️ Errores comunes</a:t>
             </a:r>
           </a:p>
         </p:txBody>
@@ -3564,6 +3507,334 @@
                   <a:srgbClr val="22282E"/>
                 </a:solidFill>
               </a:rPr>
+              <a:t>•  La persistencia no reactiva — Ruta o permisos del payload; verifica que exista y sea ejecutable</a:t>
+            </a:r>
+          </a:p>
+          <a:p>
+            <a:pPr>
+              <a:spcAft>
+                <a:spcPts val="600"/>
+              </a:spcAft>
+            </a:pPr>
+            <a:r>
+              <a:rPr sz="1500">
+                <a:solidFill>
+                  <a:srgbClr val="22282E"/>
+                </a:solidFill>
+              </a:rPr>
+              <a:t>•  crontab -r borra todo el crontab — Cuidado: elimina TODAS las tareas; edita en vez de borrar si hay legítimas</a:t>
+            </a:r>
+          </a:p>
+          <a:p>
+            <a:pPr>
+              <a:spcAft>
+                <a:spcPts val="600"/>
+              </a:spcAft>
+            </a:pPr>
+            <a:r>
+              <a:rPr sz="1500">
+                <a:solidFill>
+                  <a:srgbClr val="22282E"/>
+                </a:solidFill>
+              </a:rPr>
+              <a:t>•  Run key ejecuta pero sin sesión — LHOST/handler no disponibles; ten el listener activo</a:t>
+            </a:r>
+          </a:p>
+          <a:p>
+            <a:pPr>
+              <a:spcAft>
+                <a:spcPts val="600"/>
+              </a:spcAft>
+            </a:pPr>
+            <a:r>
+              <a:rPr sz="1500">
+                <a:solidFill>
+                  <a:srgbClr val="22282E"/>
+                </a:solidFill>
+              </a:rPr>
+              <a:t>•  Tarea no corre onlogon — Trigger o usuario incorrectos; revisa con schtasks /query /v</a:t>
+            </a:r>
+          </a:p>
+          <a:p>
+            <a:pPr>
+              <a:spcAft>
+                <a:spcPts val="600"/>
+              </a:spcAft>
+            </a:pPr>
+            <a:r>
+              <a:rPr sz="1500">
+                <a:solidFill>
+                  <a:srgbClr val="22282E"/>
+                </a:solidFill>
+              </a:rPr>
+              <a:t>•  Olvidas limpiar un artefacto — Sin cleanup log; documenta SIEMPRE cada cambio</a:t>
+            </a:r>
+          </a:p>
+        </p:txBody>
+      </p:sp>
+    </p:spTree>
+  </p:cSld>
+  <p:clrMapOvr>
+    <a:masterClrMapping/>
+  </p:clrMapOvr>
+</p:sld>
+</file>
+
+<file path=ppt/slides/slide13.xml><?xml version="1.0" encoding="utf-8"?>
+<p:sld xmlns:a="http://schemas.openxmlformats.org/drawingml/2006/main" xmlns:p="http://schemas.openxmlformats.org/presentationml/2006/main" xmlns:r="http://schemas.openxmlformats.org/officeDocument/2006/relationships">
+  <p:cSld>
+    <p:spTree>
+      <p:nvGrpSpPr>
+        <p:cNvPr id="1" name=""/>
+        <p:cNvGrpSpPr/>
+        <p:nvPr/>
+      </p:nvGrpSpPr>
+      <p:grpSpPr/>
+      <p:sp>
+        <p:nvSpPr>
+          <p:cNvPr id="2" name="TextBox 1"/>
+          <p:cNvSpPr txBox="1"/>
+          <p:nvPr/>
+        </p:nvSpPr>
+        <p:spPr>
+          <a:xfrm>
+            <a:off x="457200" y="320040"/>
+            <a:ext cx="8229600" cy="822960"/>
+          </a:xfrm>
+          <a:prstGeom prst="rect">
+            <a:avLst/>
+          </a:prstGeom>
+          <a:noFill/>
+        </p:spPr>
+        <p:txBody>
+          <a:bodyPr wrap="square">
+            <a:spAutoFit/>
+          </a:bodyPr>
+          <a:lstStyle/>
+          <a:p>
+            <a:r>
+              <a:rPr sz="2600" b="1">
+                <a:solidFill>
+                  <a:srgbClr val="0B3D2E"/>
+                </a:solidFill>
+              </a:rPr>
+              <a:t>❓ Preguntas frecuentes</a:t>
+            </a:r>
+          </a:p>
+        </p:txBody>
+      </p:sp>
+      <p:sp>
+        <p:nvSpPr>
+          <p:cNvPr id="3" name="TextBox 2"/>
+          <p:cNvSpPr txBox="1"/>
+          <p:nvPr/>
+        </p:nvSpPr>
+        <p:spPr>
+          <a:xfrm>
+            <a:off x="457200" y="1280160"/>
+            <a:ext cx="8229600" cy="4937760"/>
+          </a:xfrm>
+          <a:prstGeom prst="rect">
+            <a:avLst/>
+          </a:prstGeom>
+          <a:noFill/>
+        </p:spPr>
+        <p:txBody>
+          <a:bodyPr wrap="square">
+            <a:spAutoFit/>
+          </a:bodyPr>
+          <a:lstStyle/>
+          <a:p>
+            <a:pPr>
+              <a:spcAft>
+                <a:spcPts val="600"/>
+              </a:spcAft>
+            </a:pPr>
+            <a:r>
+              <a:rPr sz="1500">
+                <a:solidFill>
+                  <a:srgbClr val="22282E"/>
+                </a:solidFill>
+              </a:rPr>
+              <a:t>•  ❓ ¿Por qué demostrar persistencia en un pentest?</a:t>
+            </a:r>
+          </a:p>
+          <a:p>
+            <a:pPr>
+              <a:spcAft>
+                <a:spcPts val="600"/>
+              </a:spcAft>
+            </a:pPr>
+            <a:r>
+              <a:rPr sz="1500">
+                <a:solidFill>
+                  <a:srgbClr val="22282E"/>
+                </a:solidFill>
+              </a:rPr>
+              <a:t>•  Porque muestra al cliente el impacto real: un atacante no solo entra, se queda. Ayuda a justificar inversiones en detección y respuesta. Pero se hace de forma controlada y reversible.</a:t>
+            </a:r>
+          </a:p>
+          <a:p>
+            <a:pPr>
+              <a:spcAft>
+                <a:spcPts val="600"/>
+              </a:spcAft>
+            </a:pPr>
+            <a:r>
+              <a:rPr sz="1500">
+                <a:solidFill>
+                  <a:srgbClr val="22282E"/>
+                </a:solidFill>
+              </a:rPr>
+              <a:t>•  ❓ ¿Cuál es la técnica de persistencia más común?</a:t>
+            </a:r>
+          </a:p>
+          <a:p>
+            <a:pPr>
+              <a:spcAft>
+                <a:spcPts val="600"/>
+              </a:spcAft>
+            </a:pPr>
+            <a:r>
+              <a:rPr sz="1500">
+                <a:solidFill>
+                  <a:srgbClr val="22282E"/>
+                </a:solidFill>
+              </a:rPr>
+              <a:t>•  En Windows, las Run keys y las tareas programadas; en Linux, cron y claves SSH. Son fáciles de implementar y, si no se monitorizan, pasan desapercibidas.</a:t>
+            </a:r>
+          </a:p>
+          <a:p>
+            <a:pPr>
+              <a:spcAft>
+                <a:spcPts val="600"/>
+              </a:spcAft>
+            </a:pPr>
+            <a:r>
+              <a:rPr sz="1500">
+                <a:solidFill>
+                  <a:srgbClr val="22282E"/>
+                </a:solidFill>
+              </a:rPr>
+              <a:t>•  ❓ ¿Qué es una persistencia "fileless"?</a:t>
+            </a:r>
+          </a:p>
+          <a:p>
+            <a:pPr>
+              <a:spcAft>
+                <a:spcPts val="600"/>
+              </a:spcAft>
+            </a:pPr>
+            <a:r>
+              <a:rPr sz="1500">
+                <a:solidFill>
+                  <a:srgbClr val="22282E"/>
+                </a:solidFill>
+              </a:rPr>
+              <a:t>•  Una que no deja archivos en disco, como las suscripciones a eventos WMI o el uso del registro para almacenar payloads. Son más difíciles de detectar por antivirus tradicionales.</a:t>
+            </a:r>
+          </a:p>
+          <a:p>
+            <a:pPr>
+              <a:spcAft>
+                <a:spcPts val="600"/>
+              </a:spcAft>
+            </a:pPr>
+            <a:r>
+              <a:rPr sz="1500">
+                <a:solidFill>
+                  <a:srgbClr val="22282E"/>
+                </a:solidFill>
+              </a:rPr>
+              <a:t>•  ❓ ¿Qué pasa si olvido limpiar una persistencia?</a:t>
+            </a:r>
+          </a:p>
+        </p:txBody>
+      </p:sp>
+    </p:spTree>
+  </p:cSld>
+  <p:clrMapOvr>
+    <a:masterClrMapping/>
+  </p:clrMapOvr>
+</p:sld>
+</file>
+
+<file path=ppt/slides/slide14.xml><?xml version="1.0" encoding="utf-8"?>
+<p:sld xmlns:a="http://schemas.openxmlformats.org/drawingml/2006/main" xmlns:p="http://schemas.openxmlformats.org/presentationml/2006/main" xmlns:r="http://schemas.openxmlformats.org/officeDocument/2006/relationships">
+  <p:cSld>
+    <p:spTree>
+      <p:nvGrpSpPr>
+        <p:cNvPr id="1" name=""/>
+        <p:cNvGrpSpPr/>
+        <p:nvPr/>
+      </p:nvGrpSpPr>
+      <p:grpSpPr/>
+      <p:sp>
+        <p:nvSpPr>
+          <p:cNvPr id="2" name="TextBox 1"/>
+          <p:cNvSpPr txBox="1"/>
+          <p:nvPr/>
+        </p:nvSpPr>
+        <p:spPr>
+          <a:xfrm>
+            <a:off x="457200" y="320040"/>
+            <a:ext cx="8229600" cy="822960"/>
+          </a:xfrm>
+          <a:prstGeom prst="rect">
+            <a:avLst/>
+          </a:prstGeom>
+          <a:noFill/>
+        </p:spPr>
+        <p:txBody>
+          <a:bodyPr wrap="square">
+            <a:spAutoFit/>
+          </a:bodyPr>
+          <a:lstStyle/>
+          <a:p>
+            <a:r>
+              <a:rPr sz="2600" b="1">
+                <a:solidFill>
+                  <a:srgbClr val="0B3D2E"/>
+                </a:solidFill>
+              </a:rPr>
+              <a:t>🔗 Referencias</a:t>
+            </a:r>
+          </a:p>
+        </p:txBody>
+      </p:sp>
+      <p:sp>
+        <p:nvSpPr>
+          <p:cNvPr id="3" name="TextBox 2"/>
+          <p:cNvSpPr txBox="1"/>
+          <p:nvPr/>
+        </p:nvSpPr>
+        <p:spPr>
+          <a:xfrm>
+            <a:off x="457200" y="1280160"/>
+            <a:ext cx="8229600" cy="4937760"/>
+          </a:xfrm>
+          <a:prstGeom prst="rect">
+            <a:avLst/>
+          </a:prstGeom>
+          <a:noFill/>
+        </p:spPr>
+        <p:txBody>
+          <a:bodyPr wrap="square">
+            <a:spAutoFit/>
+          </a:bodyPr>
+          <a:lstStyle/>
+          <a:p>
+            <a:pPr>
+              <a:spcAft>
+                <a:spcPts val="600"/>
+              </a:spcAft>
+            </a:pPr>
+            <a:r>
+              <a:rPr sz="1500">
+                <a:solidFill>
+                  <a:srgbClr val="22282E"/>
+                </a:solidFill>
+              </a:rPr>
               <a:t>•  Kim, P. The Hacker Playbook 3 (2018).</a:t>
             </a:r>
           </a:p>
@@ -3614,6 +3885,81 @@
           </a:p>
         </p:txBody>
       </p:sp>
+    </p:spTree>
+  </p:cSld>
+  <p:clrMapOvr>
+    <a:masterClrMapping/>
+  </p:clrMapOvr>
+</p:sld>
+</file>
+
+<file path=ppt/slides/slide15.xml><?xml version="1.0" encoding="utf-8"?>
+<p:sld xmlns:a="http://schemas.openxmlformats.org/drawingml/2006/main" xmlns:p="http://schemas.openxmlformats.org/presentationml/2006/main" xmlns:r="http://schemas.openxmlformats.org/officeDocument/2006/relationships">
+  <p:cSld>
+    <p:spTree>
+      <p:nvGrpSpPr>
+        <p:cNvPr id="1" name=""/>
+        <p:cNvGrpSpPr/>
+        <p:nvPr/>
+      </p:nvGrpSpPr>
+      <p:grpSpPr/>
+      <p:sp>
+        <p:nvSpPr>
+          <p:cNvPr id="2" name="TextBox 1"/>
+          <p:cNvSpPr txBox="1"/>
+          <p:nvPr/>
+        </p:nvSpPr>
+        <p:spPr>
+          <a:xfrm>
+            <a:off x="457200" y="274320"/>
+            <a:ext cx="8229600" cy="640080"/>
+          </a:xfrm>
+          <a:prstGeom prst="rect">
+            <a:avLst/>
+          </a:prstGeom>
+          <a:noFill/>
+        </p:spPr>
+        <p:txBody>
+          <a:bodyPr wrap="square">
+            <a:spAutoFit/>
+          </a:bodyPr>
+          <a:lstStyle/>
+          <a:p>
+            <a:r>
+              <a:rPr sz="2200" b="1">
+                <a:solidFill>
+                  <a:srgbClr val="0B3D2E"/>
+                </a:solidFill>
+              </a:rPr>
+              <a:t>Diagrama de la clase</a:t>
+            </a:r>
+          </a:p>
+        </p:txBody>
+      </p:sp>
+      <p:pic>
+        <p:nvPicPr>
+          <p:cNvPr id="3" name="Picture 2" descr="d5be51a75a84fb1e.png"/>
+          <p:cNvPicPr>
+            <a:picLocks noChangeAspect="1"/>
+          </p:cNvPicPr>
+          <p:nvPr/>
+        </p:nvPicPr>
+        <p:blipFill>
+          <a:blip r:embed="rId2"/>
+          <a:stretch>
+            <a:fillRect/>
+          </a:stretch>
+        </p:blipFill>
+        <p:spPr>
+          <a:xfrm>
+            <a:off x="457200" y="2606040"/>
+            <a:ext cx="8229600" cy="2286000"/>
+          </a:xfrm>
+          <a:prstGeom prst="rect">
+            <a:avLst/>
+          </a:prstGeom>
+        </p:spPr>
+      </p:pic>
     </p:spTree>
   </p:cSld>
   <p:clrMapOvr>
@@ -3698,7 +4044,7 @@
                   <a:srgbClr val="22282E"/>
                 </a:solidFill>
               </a:rPr>
-              <a:t>•  Establecer y documentar mecanismos de persistencia —mantener el acceso tras reinicios o cambios de credenciales— tanto en Linux como en Windows, entendiendo cómo los usan los atacantes reales y, sobre todo, cómo detectarlos. En un pentest, la persistencia se demuestra de forma controlada y se limpia al terminar.</a:t>
+              <a:t>•  Establecer y documentar mecanismos de persistencia —mantener el acceso tras reinicios o cambios de credenciales— tanto en Linux como en Windows, entendiendo cómo los usan los atacantes reales y…</a:t>
             </a:r>
           </a:p>
         </p:txBody>
@@ -4092,7 +4438,7 @@
                   <a:srgbClr val="0B3D2E"/>
                 </a:solidFill>
               </a:rPr>
-              <a:t>📖 Definiciones y características</a:t>
+              <a:t>🧠 Explicación en profundidad</a:t>
             </a:r>
           </a:p>
         </p:txBody>
@@ -4130,82 +4476,97 @@
                   <a:srgbClr val="22282E"/>
                 </a:solidFill>
               </a:rPr>
-              <a:t>•  Persistencia: capacidad de recuperar el acceso tras reinicios o rotación de credenciales. Característica clave: convierte un acceso efímero en duradero.</a:t>
-            </a:r>
-          </a:p>
-          <a:p>
-            <a:pPr>
-              <a:spcAft>
-                <a:spcPts val="600"/>
-              </a:spcAft>
-            </a:pPr>
-            <a:r>
-              <a:rPr sz="1500">
-                <a:solidFill>
-                  <a:srgbClr val="22282E"/>
-                </a:solidFill>
-              </a:rPr>
-              <a:t>•  Cron/systemd timer: ejecución programada en Linux. Característica clave: reejecuta un payload periódicamente o al arranque.</a:t>
-            </a:r>
-          </a:p>
-          <a:p>
-            <a:pPr>
-              <a:spcAft>
-                <a:spcPts val="600"/>
-              </a:spcAft>
-            </a:pPr>
-            <a:r>
-              <a:rPr sz="1500">
-                <a:solidFill>
-                  <a:srgbClr val="22282E"/>
-                </a:solidFill>
-              </a:rPr>
-              <a:t>•  authorizedkeys: clave pública que permite login SSH sin contraseña. Característica clave: sobrevive a cambios de contraseña.</a:t>
-            </a:r>
-          </a:p>
-          <a:p>
-            <a:pPr>
-              <a:spcAft>
-                <a:spcPts val="600"/>
-              </a:spcAft>
-            </a:pPr>
-            <a:r>
-              <a:rPr sz="1500">
-                <a:solidFill>
-                  <a:srgbClr val="22282E"/>
-                </a:solidFill>
-              </a:rPr>
-              <a:t>•  Run key (registro): valor en HKCU/HKLM\...\Run que se ejecuta al iniciar sesión. Característica clave: vector de persistencia Windows más habitual.</a:t>
-            </a:r>
-          </a:p>
-          <a:p>
-            <a:pPr>
-              <a:spcAft>
-                <a:spcPts val="600"/>
-              </a:spcAft>
-            </a:pPr>
-            <a:r>
-              <a:rPr sz="1500">
-                <a:solidFill>
-                  <a:srgbClr val="22282E"/>
-                </a:solidFill>
-              </a:rPr>
-              <a:t>•  WMI event subscription: persistencia basada en eventos WMI. Característica clave: no deja archivos ("fileless"), difícil de detectar.</a:t>
-            </a:r>
-          </a:p>
-          <a:p>
-            <a:pPr>
-              <a:spcAft>
-                <a:spcPts val="600"/>
-              </a:spcAft>
-            </a:pPr>
-            <a:r>
-              <a:rPr sz="1500">
-                <a:solidFill>
-                  <a:srgbClr val="22282E"/>
-                </a:solidFill>
-              </a:rPr>
-              <a:t>•  Limpieza (cleanup): eliminación de artefactos al finalizar. Característica clave: obligación ética y contractual del pentester.</a:t>
+              <a:t>•  Un acceso se puede perder: la máquina se reinicia, el proceso vulnerable se cierra, la</a:t>
+            </a:r>
+          </a:p>
+          <a:p>
+            <a:pPr>
+              <a:spcAft>
+                <a:spcPts val="600"/>
+              </a:spcAft>
+            </a:pPr>
+            <a:r>
+              <a:rPr sz="1500">
+                <a:solidFill>
+                  <a:srgbClr val="22282E"/>
+                </a:solidFill>
+              </a:rPr>
+              <a:t>•  credencial usada caduca. La persistencia son las técnicas para recuperar el acceso</a:t>
+            </a:r>
+          </a:p>
+          <a:p>
+            <a:pPr>
+              <a:spcAft>
+                <a:spcPts val="600"/>
+              </a:spcAft>
+            </a:pPr>
+            <a:r>
+              <a:rPr sz="1500">
+                <a:solidFill>
+                  <a:srgbClr val="22282E"/>
+                </a:solidFill>
+              </a:rPr>
+              <a:t>•  automáticamente sin volver a explotar desde cero. En un pentest tiene un doble propósito:</a:t>
+            </a:r>
+          </a:p>
+          <a:p>
+            <a:pPr>
+              <a:spcAft>
+                <a:spcPts val="600"/>
+              </a:spcAft>
+            </a:pPr>
+            <a:r>
+              <a:rPr sz="1500">
+                <a:solidFill>
+                  <a:srgbClr val="22282E"/>
+                </a:solidFill>
+              </a:rPr>
+              <a:t>•  demostrar que un atacante real podría afianzarse (parte del impacto que se reporta) y, sobre</a:t>
+            </a:r>
+          </a:p>
+          <a:p>
+            <a:pPr>
+              <a:spcAft>
+                <a:spcPts val="600"/>
+              </a:spcAft>
+            </a:pPr>
+            <a:r>
+              <a:rPr sz="1500">
+                <a:solidFill>
+                  <a:srgbClr val="22282E"/>
+                </a:solidFill>
+              </a:rPr>
+              <a:t>•  todo, enseñar al equipo azul qué buscar, porque cada técnica de persistencia deja un</a:t>
+            </a:r>
+          </a:p>
+          <a:p>
+            <a:pPr>
+              <a:spcAft>
+                <a:spcPts val="600"/>
+              </a:spcAft>
+            </a:pPr>
+            <a:r>
+              <a:rPr sz="1500">
+                <a:solidFill>
+                  <a:srgbClr val="22282E"/>
+                </a:solidFill>
+              </a:rPr>
+              <a:t>•  artefacto detectable. La persistencia mapea a la táctica Persistence de MITRE ATT&amp;CK, y</a:t>
+            </a:r>
+          </a:p>
+          <a:p>
+            <a:pPr>
+              <a:spcAft>
+                <a:spcPts val="600"/>
+              </a:spcAft>
+            </a:pPr>
+            <a:r>
+              <a:rPr sz="1500">
+                <a:solidFill>
+                  <a:srgbClr val="22282E"/>
+                </a:solidFill>
+              </a:rPr>
+              <a:t>•  usar ese vocabulario conecta el hallazgo con la detección.</a:t>
             </a:r>
           </a:p>
         </p:txBody>
@@ -4256,7 +4617,7 @@
                   <a:srgbClr val="0B3D2E"/>
                 </a:solidFill>
               </a:rPr>
-              <a:t>🧰 Herramientas y preparación</a:t>
+              <a:t>📖 Definiciones y características</a:t>
             </a:r>
           </a:p>
         </p:txBody>
@@ -4294,22 +4655,82 @@
                   <a:srgbClr val="22282E"/>
                 </a:solidFill>
               </a:rPr>
-              <a:t>•  Metasploit (post//manage/persistence), scripts nativos, y para Windows: schtasks, reg, sc.</a:t>
-            </a:r>
-          </a:p>
-          <a:p>
-            <a:pPr>
-              <a:spcAft>
-                <a:spcPts val="600"/>
-              </a:spcAft>
-            </a:pPr>
-            <a:r>
-              <a:rPr sz="1500">
-                <a:solidFill>
-                  <a:srgbClr val="22282E"/>
-                </a:solidFill>
-              </a:rPr>
-              <a:t>•  Un registro (log) donde apuntes cada artefacto que instalas para poder revertirlo.</a:t>
+              <a:t>•  Persistencia: capacidad de recuperar el acceso tras reinicios o rotación de credenciales. Característica clave: convierte un acceso efímero en duradero.</a:t>
+            </a:r>
+          </a:p>
+          <a:p>
+            <a:pPr>
+              <a:spcAft>
+                <a:spcPts val="600"/>
+              </a:spcAft>
+            </a:pPr>
+            <a:r>
+              <a:rPr sz="1500">
+                <a:solidFill>
+                  <a:srgbClr val="22282E"/>
+                </a:solidFill>
+              </a:rPr>
+              <a:t>•  Cron/systemd timer: ejecución programada en Linux. Característica clave: reejecuta un payload periódicamente o al arranque.</a:t>
+            </a:r>
+          </a:p>
+          <a:p>
+            <a:pPr>
+              <a:spcAft>
+                <a:spcPts val="600"/>
+              </a:spcAft>
+            </a:pPr>
+            <a:r>
+              <a:rPr sz="1500">
+                <a:solidFill>
+                  <a:srgbClr val="22282E"/>
+                </a:solidFill>
+              </a:rPr>
+              <a:t>•  authorizedkeys: clave pública que permite login SSH sin contraseña. Característica clave: sobrevive a cambios de contraseña.</a:t>
+            </a:r>
+          </a:p>
+          <a:p>
+            <a:pPr>
+              <a:spcAft>
+                <a:spcPts val="600"/>
+              </a:spcAft>
+            </a:pPr>
+            <a:r>
+              <a:rPr sz="1500">
+                <a:solidFill>
+                  <a:srgbClr val="22282E"/>
+                </a:solidFill>
+              </a:rPr>
+              <a:t>•  Run key (registro): valor en HKCU/HKLM\...\Run que se ejecuta al iniciar sesión. Característica clave: vector de persistencia Windows más habitual.</a:t>
+            </a:r>
+          </a:p>
+          <a:p>
+            <a:pPr>
+              <a:spcAft>
+                <a:spcPts val="600"/>
+              </a:spcAft>
+            </a:pPr>
+            <a:r>
+              <a:rPr sz="1500">
+                <a:solidFill>
+                  <a:srgbClr val="22282E"/>
+                </a:solidFill>
+              </a:rPr>
+              <a:t>•  WMI event subscription: persistencia basada en eventos WMI. Característica clave: no deja archivos ("fileless"), difícil de detectar.</a:t>
+            </a:r>
+          </a:p>
+          <a:p>
+            <a:pPr>
+              <a:spcAft>
+                <a:spcPts val="600"/>
+              </a:spcAft>
+            </a:pPr>
+            <a:r>
+              <a:rPr sz="1500">
+                <a:solidFill>
+                  <a:srgbClr val="22282E"/>
+                </a:solidFill>
+              </a:rPr>
+              <a:t>•  Limpieza (cleanup): eliminación de artefactos al finalizar. Característica clave: obligación ética y contractual del pentester.</a:t>
             </a:r>
           </a:p>
         </p:txBody>
@@ -4360,7 +4781,7 @@
                   <a:srgbClr val="0B3D2E"/>
                 </a:solidFill>
               </a:rPr>
-              <a:t>🧪 Laboratorio guiado</a:t>
+              <a:t>📔 Glosario</a:t>
             </a:r>
           </a:p>
         </p:txBody>
@@ -4398,97 +4819,97 @@
                   <a:srgbClr val="22282E"/>
                 </a:solidFill>
               </a:rPr>
-              <a:t>•  Registra cada acción en un "cleanup log" para revertirla después.</a:t>
-            </a:r>
-          </a:p>
-          <a:p>
-            <a:pPr>
-              <a:spcAft>
-                <a:spcPts val="600"/>
-              </a:spcAft>
-            </a:pPr>
-            <a:r>
-              <a:rPr sz="1500">
-                <a:solidFill>
-                  <a:srgbClr val="22282E"/>
-                </a:solidFill>
-              </a:rPr>
-              <a:t>•  Persistencia Linux con cron:</a:t>
-            </a:r>
-          </a:p>
-          <a:p>
-            <a:pPr>
-              <a:spcAft>
-                <a:spcPts val="600"/>
-              </a:spcAft>
-            </a:pPr>
-            <a:r>
-              <a:rPr sz="1500">
-                <a:solidFill>
-                  <a:srgbClr val="22282E"/>
-                </a:solidFill>
-              </a:rPr>
-              <a:t>•  (crontab -l 2&gt;/dev/null; echo "/10     /tmp/.beacon.sh") | crontab -</a:t>
-            </a:r>
-          </a:p>
-          <a:p>
-            <a:pPr>
-              <a:spcAft>
-                <a:spcPts val="600"/>
-              </a:spcAft>
-            </a:pPr>
-            <a:r>
-              <a:rPr sz="1500">
-                <a:solidFill>
-                  <a:srgbClr val="22282E"/>
-                </a:solidFill>
-              </a:rPr>
-              <a:t>•  Clave SSH autorizada:</a:t>
-            </a:r>
-          </a:p>
-          <a:p>
-            <a:pPr>
-              <a:spcAft>
-                <a:spcPts val="600"/>
-              </a:spcAft>
-            </a:pPr>
-            <a:r>
-              <a:rPr sz="1500">
-                <a:solidFill>
-                  <a:srgbClr val="22282E"/>
-                </a:solidFill>
-              </a:rPr>
-              <a:t>•  echo "ssh-ed25519 AAAA... atacante" &gt;&gt; ~/.ssh/authorizedkeys</a:t>
-            </a:r>
-          </a:p>
-          <a:p>
-            <a:pPr>
-              <a:spcAft>
-                <a:spcPts val="600"/>
-              </a:spcAft>
-            </a:pPr>
-            <a:r>
-              <a:rPr sz="1500">
-                <a:solidFill>
-                  <a:srgbClr val="22282E"/>
-                </a:solidFill>
-              </a:rPr>
-              <a:t>•  Persistencia Windows con Run key:</a:t>
-            </a:r>
-          </a:p>
-          <a:p>
-            <a:pPr>
-              <a:spcAft>
-                <a:spcPts val="600"/>
-              </a:spcAft>
-            </a:pPr>
-            <a:r>
-              <a:rPr sz="1500">
-                <a:solidFill>
-                  <a:srgbClr val="22282E"/>
-                </a:solidFill>
-              </a:rPr>
-              <a:t>•  reg add HKCU\Software\Microsoft\Windows\CurrentVersion\Run /v Updater /t REGSZ /d "C:\Users\Public\upd.exe" /f</a:t>
+              <a:t>•  Término — Definición concisa</a:t>
+            </a:r>
+          </a:p>
+          <a:p>
+            <a:pPr>
+              <a:spcAft>
+                <a:spcPts val="600"/>
+              </a:spcAft>
+            </a:pPr>
+            <a:r>
+              <a:rPr sz="1500">
+                <a:solidFill>
+                  <a:srgbClr val="22282E"/>
+                </a:solidFill>
+              </a:rPr>
+              <a:t>•  Persistencia — Recuperar el acceso automáticamente sin reexplotar</a:t>
+            </a:r>
+          </a:p>
+          <a:p>
+            <a:pPr>
+              <a:spcAft>
+                <a:spcPts val="600"/>
+              </a:spcAft>
+            </a:pPr>
+            <a:r>
+              <a:rPr sz="1500">
+                <a:solidFill>
+                  <a:srgbClr val="22282E"/>
+                </a:solidFill>
+              </a:rPr>
+              <a:t>•  MITRE ATT&amp;CK Persistence — Táctica que cataloga estas técnicas</a:t>
+            </a:r>
+          </a:p>
+          <a:p>
+            <a:pPr>
+              <a:spcAft>
+                <a:spcPts val="600"/>
+              </a:spcAft>
+            </a:pPr>
+            <a:r>
+              <a:rPr sz="1500">
+                <a:solidFill>
+                  <a:srgbClr val="22282E"/>
+                </a:solidFill>
+              </a:rPr>
+              <a:t>•  cron / systemd timer — Reejecución programada en Linux</a:t>
+            </a:r>
+          </a:p>
+          <a:p>
+            <a:pPr>
+              <a:spcAft>
+                <a:spcPts val="600"/>
+              </a:spcAft>
+            </a:pPr>
+            <a:r>
+              <a:rPr sz="1500">
+                <a:solidFill>
+                  <a:srgbClr val="22282E"/>
+                </a:solidFill>
+              </a:rPr>
+              <a:t>•  authorizedkeys — Clave SSH que da acceso sin contraseña</a:t>
+            </a:r>
+          </a:p>
+          <a:p>
+            <a:pPr>
+              <a:spcAft>
+                <a:spcPts val="600"/>
+              </a:spcAft>
+            </a:pPr>
+            <a:r>
+              <a:rPr sz="1500">
+                <a:solidFill>
+                  <a:srgbClr val="22282E"/>
+                </a:solidFill>
+              </a:rPr>
+              <a:t>•  Run keys — Claves del registro que ejecutan en el inicio de sesión</a:t>
+            </a:r>
+          </a:p>
+          <a:p>
+            <a:pPr>
+              <a:spcAft>
+                <a:spcPts val="600"/>
+              </a:spcAft>
+            </a:pPr>
+            <a:r>
+              <a:rPr sz="1500">
+                <a:solidFill>
+                  <a:srgbClr val="22282E"/>
+                </a:solidFill>
+              </a:rPr>
+              <a:t>•  Tarea programada — Ejecución con privilegios al arranque en Windows</a:t>
             </a:r>
           </a:p>
         </p:txBody>
@@ -4539,7 +4960,7 @@
                   <a:srgbClr val="0B3D2E"/>
                 </a:solidFill>
               </a:rPr>
-              <a:t>✍️ Ejercicios</a:t>
+              <a:t>🧰 Herramientas y preparación</a:t>
             </a:r>
           </a:p>
         </p:txBody>
@@ -4577,82 +4998,22 @@
                   <a:srgbClr val="22282E"/>
                 </a:solidFill>
               </a:rPr>
-              <a:t>•  Instala y luego elimina una persistencia por cron, documentando ambos pasos.</a:t>
-            </a:r>
-          </a:p>
-          <a:p>
-            <a:pPr>
-              <a:spcAft>
-                <a:spcPts val="600"/>
-              </a:spcAft>
-            </a:pPr>
-            <a:r>
-              <a:rPr sz="1500">
-                <a:solidFill>
-                  <a:srgbClr val="22282E"/>
-                </a:solidFill>
-              </a:rPr>
-              <a:t>•  Añade una clave SSH autorizada y explica por qué es difícil de detectar.</a:t>
-            </a:r>
-          </a:p>
-          <a:p>
-            <a:pPr>
-              <a:spcAft>
-                <a:spcPts val="600"/>
-              </a:spcAft>
-            </a:pPr>
-            <a:r>
-              <a:rPr sz="1500">
-                <a:solidFill>
-                  <a:srgbClr val="22282E"/>
-                </a:solidFill>
-              </a:rPr>
-              <a:t>•  Crea una tarea programada Windows onlogon y verifícala con schtasks /query.</a:t>
-            </a:r>
-          </a:p>
-          <a:p>
-            <a:pPr>
-              <a:spcAft>
-                <a:spcPts val="600"/>
-              </a:spcAft>
-            </a:pPr>
-            <a:r>
-              <a:rPr sz="1500">
-                <a:solidFill>
-                  <a:srgbClr val="22282E"/>
-                </a:solidFill>
-              </a:rPr>
-              <a:t>•  Mapea cinco técnicas de persistencia a sus IDs de MITRE ATT&amp;CK.</a:t>
-            </a:r>
-          </a:p>
-          <a:p>
-            <a:pPr>
-              <a:spcAft>
-                <a:spcPts val="600"/>
-              </a:spcAft>
-            </a:pPr>
-            <a:r>
-              <a:rPr sz="1500">
-                <a:solidFill>
-                  <a:srgbClr val="22282E"/>
-                </a:solidFill>
-              </a:rPr>
-              <a:t>•  Explica cómo un defensor detecta cambios en las Run keys.</a:t>
-            </a:r>
-          </a:p>
-          <a:p>
-            <a:pPr>
-              <a:spcAft>
-                <a:spcPts val="600"/>
-              </a:spcAft>
-            </a:pPr>
-            <a:r>
-              <a:rPr sz="1500">
-                <a:solidFill>
-                  <a:srgbClr val="22282E"/>
-                </a:solidFill>
-              </a:rPr>
-              <a:t>•  Redacta un "cleanup log" modelo con columnas: técnica, artefacto, comando de reversión.</a:t>
+              <a:t>•  Metasploit (post//manage/persistence), scripts nativos, y para Windows: schtasks, reg, sc.</a:t>
+            </a:r>
+          </a:p>
+          <a:p>
+            <a:pPr>
+              <a:spcAft>
+                <a:spcPts val="600"/>
+              </a:spcAft>
+            </a:pPr>
+            <a:r>
+              <a:rPr sz="1500">
+                <a:solidFill>
+                  <a:srgbClr val="22282E"/>
+                </a:solidFill>
+              </a:rPr>
+              <a:t>•  Un registro (log) donde apuntes cada artefacto que instalas para poder revertirlo.</a:t>
             </a:r>
           </a:p>
         </p:txBody>
@@ -4703,7 +5064,7 @@
                   <a:srgbClr val="0B3D2E"/>
                 </a:solidFill>
               </a:rPr>
-              <a:t>📝 Reto verificable</a:t>
+              <a:t>🧪 Laboratorio guiado</a:t>
             </a:r>
           </a:p>
         </p:txBody>
@@ -4741,22 +5102,97 @@
                   <a:srgbClr val="22282E"/>
                 </a:solidFill>
               </a:rPr>
-              <a:t>•  Implementa una persistencia por sistema operativo (Linux y Windows) en tu laboratorio, verifica que sobreviven a un reinicio y límpialas por completo.</a:t>
-            </a:r>
-          </a:p>
-          <a:p>
-            <a:pPr>
-              <a:spcAft>
-                <a:spcPts val="600"/>
-              </a:spcAft>
-            </a:pPr>
-            <a:r>
-              <a:rPr sz="1500">
-                <a:solidFill>
-                  <a:srgbClr val="22282E"/>
-                </a:solidFill>
-              </a:rPr>
-              <a:t>•  Criterio de aceptación: demuestras que ambas persistencias reactivan el acceso tras reiniciar; presentas un cleanup log con el comando de reversión de cada una; tras la limpieza, una comprobación muestra que no queda ningún artefacto. Todo en entorno propio.</a:t>
+              <a:t>•  Registra cada acción en un "cleanup log" para revertirla después.</a:t>
+            </a:r>
+          </a:p>
+          <a:p>
+            <a:pPr>
+              <a:spcAft>
+                <a:spcPts val="600"/>
+              </a:spcAft>
+            </a:pPr>
+            <a:r>
+              <a:rPr sz="1500">
+                <a:solidFill>
+                  <a:srgbClr val="22282E"/>
+                </a:solidFill>
+              </a:rPr>
+              <a:t>•  Persistencia Linux con cron:</a:t>
+            </a:r>
+          </a:p>
+          <a:p>
+            <a:pPr>
+              <a:spcAft>
+                <a:spcPts val="600"/>
+              </a:spcAft>
+            </a:pPr>
+            <a:r>
+              <a:rPr sz="1500">
+                <a:solidFill>
+                  <a:srgbClr val="22282E"/>
+                </a:solidFill>
+              </a:rPr>
+              <a:t>•  Clave SSH autorizada:</a:t>
+            </a:r>
+          </a:p>
+          <a:p>
+            <a:pPr>
+              <a:spcAft>
+                <a:spcPts val="600"/>
+              </a:spcAft>
+            </a:pPr>
+            <a:r>
+              <a:rPr sz="1500">
+                <a:solidFill>
+                  <a:srgbClr val="22282E"/>
+                </a:solidFill>
+              </a:rPr>
+              <a:t>•  Persistencia Windows con Run key:</a:t>
+            </a:r>
+          </a:p>
+          <a:p>
+            <a:pPr>
+              <a:spcAft>
+                <a:spcPts val="600"/>
+              </a:spcAft>
+            </a:pPr>
+            <a:r>
+              <a:rPr sz="1500">
+                <a:solidFill>
+                  <a:srgbClr val="22282E"/>
+                </a:solidFill>
+              </a:rPr>
+              <a:t>•  Tarea programada Windows:</a:t>
+            </a:r>
+          </a:p>
+          <a:p>
+            <a:pPr>
+              <a:spcAft>
+                <a:spcPts val="600"/>
+              </a:spcAft>
+            </a:pPr>
+            <a:r>
+              <a:rPr sz="1500">
+                <a:solidFill>
+                  <a:srgbClr val="22282E"/>
+                </a:solidFill>
+              </a:rPr>
+              <a:t>•  Mapea cada técnica a su ID de ATT&amp;CK (T1053 tareas, T1547 autostart, T1098 cuentas).</a:t>
+            </a:r>
+          </a:p>
+          <a:p>
+            <a:pPr>
+              <a:spcAft>
+                <a:spcPts val="600"/>
+              </a:spcAft>
+            </a:pPr>
+            <a:r>
+              <a:rPr sz="1500">
+                <a:solidFill>
+                  <a:srgbClr val="22282E"/>
+                </a:solidFill>
+              </a:rPr>
+              <a:t>•  Verifica que la persistencia funciona reiniciando la VM de laboratorio.</a:t>
             </a:r>
           </a:p>
         </p:txBody>
